--- a/Slides/Semana 14/semana_14_slides.pptx
+++ b/Slides/Semana 14/semana_14_slides.pptx
@@ -709,7 +709,7 @@
 - "Qual foi o problema mais difícil de resolver, e por quê?"
 - "O que vocês ouviram de outra equipe que pode ser aplicado ao próprio projeto?"
 Avaliação nesta semana: observação central de Execução e Reflexão Crítica, segundo a Rubrica de Avaliação. Observam-se também Gestão do Projeto (comunicação sobre imprevistos e ajustes) e Trabalho em Equipe (participação de todos na resolução dos problemas e na preparação do relato).
-Fonte: Plano Semanal Semana 14, Cronograma, CLAUDE.md, COURSE_CONTEXT.md, PEDAGOGICAL_RULES.md, EXTENSION_PROJECT_GUIDE.md, Plano Semanal Semana 13 (continuidade).</a:t>
+Fonte: Plano Semanal Semana 14, Cronograma, Plano Semanal Semana 13 (continuidade).</a:t>
             </a:r>
             <a:endParaRPr lang="en-US" dirty="0"/>
           </a:p>
